--- a/apps/resources/bundled_files/3-klass-bolchok-tushunugu-sabak.pptx
+++ b/apps/resources/bundled_files/3-klass-bolchok-tushunugu-sabak.pptx
@@ -5196,7 +5196,7 @@
                 </a:solidFill>
                 <a:latin typeface="PT Sans"/>
               </a:rPr>
-              <a:t>3-класс · Математика</a:t>
+              <a:t/>
             </a:r>
           </a:p>
         </p:txBody>
@@ -5400,7 +5400,7 @@
                 </a:solidFill>
                 <a:latin typeface="PT Sans"/>
               </a:rPr>
-              <a:t>Китеп: Математика стандарты: 2-класс «жарым жана чейрек» (Cambridge 2), 3-класс «сандын бөлүгү» (2011, 3.3.8) жана Cambridge Stage 3 «бөлчөктөр»; 4-класс «үлүштөр» менен байланыш. Мазмуну толук жаңы.</a:t>
+              <a:t>Китеп: Математика стандарты: 2-класс «жарым жана чейрек», 3-класс «сандын бөлүгү» (2011, 3.3.8) жана «бөлчөктөр»; 4-класс «үлүштөр» менен байланыш. Мазмуну толук жаңы.</a:t>
             </a:r>
           </a:p>
         </p:txBody>
@@ -5688,7 +5688,7 @@
                 </a:solidFill>
                 <a:latin typeface="PT Sans"/>
               </a:rPr>
-              <a:t>3-класс ›</a:t>
+              <a:t/>
             </a:r>
           </a:p>
           <a:p>
@@ -7637,7 +7637,7 @@
                 </a:solidFill>
                 <a:latin typeface="PT Sans"/>
               </a:rPr>
-              <a:t>3-класс ›</a:t>
+              <a:t/>
             </a:r>
           </a:p>
           <a:p>
@@ -12102,7 +12102,7 @@
                 </a:solidFill>
                 <a:latin typeface="PT Sans"/>
               </a:rPr>
-              <a:t>3-класс ›</a:t>
+              <a:t/>
             </a:r>
           </a:p>
           <a:p>
@@ -16134,7 +16134,7 @@
                 </a:solidFill>
                 <a:latin typeface="PT Sans"/>
               </a:rPr>
-              <a:t>3-класс ›</a:t>
+              <a:t/>
             </a:r>
           </a:p>
           <a:p>
@@ -17717,7 +17717,7 @@
                 </a:solidFill>
                 <a:latin typeface="PT Sans"/>
               </a:rPr>
-              <a:t>3-класс ›</a:t>
+              <a:t/>
             </a:r>
           </a:p>
           <a:p>
@@ -19104,7 +19104,7 @@
                 </a:solidFill>
                 <a:latin typeface="PT Sans"/>
               </a:rPr>
-              <a:t>3-класс ›</a:t>
+              <a:t/>
             </a:r>
           </a:p>
           <a:p>
@@ -20216,7 +20216,7 @@
                 </a:solidFill>
                 <a:latin typeface="PT Sans"/>
               </a:rPr>
-              <a:t>3-класс ›</a:t>
+              <a:t/>
             </a:r>
           </a:p>
           <a:p>
@@ -21843,7 +21843,7 @@
                 </a:solidFill>
                 <a:latin typeface="PT Sans"/>
               </a:rPr>
-              <a:t>3-класс ›</a:t>
+              <a:t/>
             </a:r>
           </a:p>
           <a:p>
@@ -23295,7 +23295,7 @@
                 </a:solidFill>
                 <a:latin typeface="PT Sans"/>
               </a:rPr>
-              <a:t>3-класс ›</a:t>
+              <a:t/>
             </a:r>
           </a:p>
           <a:p>
@@ -24825,7 +24825,7 @@
                 </a:solidFill>
                 <a:latin typeface="PT Sans"/>
               </a:rPr>
-              <a:t>3-класс ›</a:t>
+              <a:t/>
             </a:r>
           </a:p>
           <a:p>
@@ -27050,7 +27050,7 @@
                 </a:solidFill>
                 <a:latin typeface="PT Sans"/>
               </a:rPr>
-              <a:t>3-класс ›</a:t>
+              <a:t/>
             </a:r>
           </a:p>
           <a:p>
@@ -28327,7 +28327,7 @@
                 </a:solidFill>
                 <a:latin typeface="PT Sans"/>
               </a:rPr>
-              <a:t>3-класс ›</a:t>
+              <a:t/>
             </a:r>
           </a:p>
           <a:p>
@@ -31644,7 +31644,7 @@
                 </a:solidFill>
                 <a:latin typeface="PT Sans"/>
               </a:rPr>
-              <a:t>3-класс ›</a:t>
+              <a:t/>
             </a:r>
           </a:p>
           <a:p>
@@ -33100,7 +33100,7 @@
                 </a:solidFill>
                 <a:latin typeface="PT Sans"/>
               </a:rPr>
-              <a:t>3-класс ›</a:t>
+              <a:t/>
             </a:r>
           </a:p>
           <a:p>
@@ -34495,7 +34495,7 @@
                 </a:solidFill>
                 <a:latin typeface="PT Sans"/>
               </a:rPr>
-              <a:t>3-класс ›</a:t>
+              <a:t/>
             </a:r>
           </a:p>
           <a:p>
@@ -35295,7 +35295,7 @@
                 </a:solidFill>
                 <a:latin typeface="PT Sans"/>
               </a:rPr>
-              <a:t>3-класс ›</a:t>
+              <a:t/>
             </a:r>
           </a:p>
           <a:p>
@@ -36136,7 +36136,7 @@
                 </a:solidFill>
                 <a:latin typeface="PT Sans"/>
               </a:rPr>
-              <a:t>3-класс ›</a:t>
+              <a:t/>
             </a:r>
           </a:p>
           <a:p>
@@ -37085,7 +37085,7 @@
                 </a:solidFill>
                 <a:latin typeface="PT Sans"/>
               </a:rPr>
-              <a:t>3-класс ›</a:t>
+              <a:t/>
             </a:r>
           </a:p>
           <a:p>
@@ -38539,7 +38539,7 @@
                 </a:solidFill>
                 <a:latin typeface="PT Sans"/>
               </a:rPr>
-              <a:t>3-класс ›</a:t>
+              <a:t/>
             </a:r>
           </a:p>
           <a:p>
@@ -39285,7 +39285,7 @@
                 </a:solidFill>
                 <a:latin typeface="PT Sans"/>
               </a:rPr>
-              <a:t>3-класс ›</a:t>
+              <a:t/>
             </a:r>
           </a:p>
           <a:p>
@@ -40093,7 +40093,7 @@
                 </a:solidFill>
                 <a:latin typeface="PT Sans"/>
               </a:rPr>
-              <a:t>3-класс ›</a:t>
+              <a:t/>
             </a:r>
           </a:p>
           <a:p>
@@ -41284,7 +41284,7 @@
                 </a:solidFill>
                 <a:latin typeface="PT Sans"/>
               </a:rPr>
-              <a:t>3-класс ›</a:t>
+              <a:t/>
             </a:r>
           </a:p>
           <a:p>
@@ -42479,7 +42479,7 @@
                 </a:solidFill>
                 <a:latin typeface="PT Sans"/>
               </a:rPr>
-              <a:t>3-класс ›</a:t>
+              <a:t/>
             </a:r>
           </a:p>
           <a:p>
@@ -42660,7 +42660,7 @@
                 </a:solidFill>
                 <a:latin typeface="PT Sans"/>
               </a:rPr>
-              <a:t>2-класс</a:t>
+              <a:t/>
             </a:r>
           </a:p>
         </p:txBody>
@@ -42840,7 +42840,7 @@
                 </a:solidFill>
                 <a:latin typeface="PT Sans"/>
               </a:rPr>
-              <a:t>3-класс</a:t>
+              <a:t/>
             </a:r>
           </a:p>
         </p:txBody>
@@ -43076,7 +43076,7 @@
                 </a:solidFill>
                 <a:latin typeface="PT Sans"/>
               </a:rPr>
-              <a:t>4-класс</a:t>
+              <a:t/>
             </a:r>
           </a:p>
         </p:txBody>
@@ -43257,7 +43257,7 @@
                 </a:solidFill>
                 <a:latin typeface="PT Sans"/>
               </a:rPr>
-              <a:t>5-класс</a:t>
+              <a:t/>
             </a:r>
           </a:p>
         </p:txBody>
@@ -43677,7 +43677,7 @@
                 </a:solidFill>
                 <a:latin typeface="PT Sans"/>
               </a:rPr>
-              <a:t>3-класс ›</a:t>
+              <a:t/>
             </a:r>
           </a:p>
           <a:p>
@@ -44825,7 +44825,7 @@
                 </a:solidFill>
                 <a:latin typeface="PT Sans"/>
               </a:rPr>
-              <a:t>3-класс ›</a:t>
+              <a:t/>
             </a:r>
           </a:p>
           <a:p>

--- a/apps/resources/bundled_files/3-klass-bolchok-tushunugu-sabak.pptx
+++ b/apps/resources/bundled_files/3-klass-bolchok-tushunugu-sabak.pptx
@@ -877,7 +877,7 @@
           <a:lstStyle/>
           <a:p>
             <a:r>
-              <a:t>Ар бир ыкманы окуучу үн чыгарып айтат: «8 бөлүктөн 3ү жейилди, 5 бөлүк калды». «Оозеки беш мүнөт» (класста колдонуу картасы) эки апта ушул ыкмаларды кайталайт.</a:t>
+              <a:t>Ар бир ыкманы окуучу үн чыгарып айтат: «8 бөлүктөн 3ү желди, 5 бөлүк калды». «Оозеки беш мүнөт» (класста колдонуу картасы) эки апта ушул ыкмаларды кайталайт.</a:t>
             </a:r>
           </a:p>
         </p:txBody>
@@ -1157,7 +1157,7 @@
           <a:lstStyle/>
           <a:p>
             <a:r>
-              <a:t>Эки нан бирдей. 8 бөлүк 4 бөлүктөн майда: 1/8 &lt; 1/4. Экинчи нандын 8 бөлүгүнөн 3ү жейилди, 5 бөлүк калды: 5/8. Кимдир бирөө «5/3» десе, бөлүмдү (баары 8 бөлүк) кайра санатам (М3).</a:t>
+              <a:t>Эки нан бирдей. 8 бөлүк 4 бөлүктөн майда: 1/8 &lt; 1/4. Экинчи нандын 8 бөлүгүнөн 3ү желди, 5 бөлүк калды: 5/8. Кимдир бирөө «5/3» десе, бөлүмдү (баары 8 бөлүк) кайра санатам (М3).</a:t>
             </a:r>
           </a:p>
         </p:txBody>
@@ -1582,7 +1582,7 @@
           <a:lstStyle/>
           <a:p>
             <a:r>
-              <a:t>Ой жүгүртүү маданияты (Wenxi Lee, 2.6).</a:t>
+              <a:t>Ой жүгүртүү маданияты (Wenxi Lee, 2,6).</a:t>
             </a:r>
           </a:p>
         </p:txBody>
@@ -15550,7 +15550,7 @@
                 </a:solidFill>
                 <a:latin typeface="PT Sans"/>
               </a:rPr>
-              <a:t>8 бөлүктөн 3ү жейилди:</a:t>
+              <a:t>8 бөлүктөн 3ү желди:</a:t>
             </a:r>
           </a:p>
         </p:txBody>
@@ -17898,7 +17898,7 @@
                 </a:solidFill>
                 <a:latin typeface="PT Sans"/>
               </a:rPr>
-              <a:t>Таене тандыр нанды 6 бирдей бөлүккө бөлдү. Коноктор 5 бөлүгүн жешти. Жейилген бөлүгү кайсы бөлчөк?</a:t>
+              <a:t>Таене тандыр нанды 6 бирдей бөлүккө бөлдү. Коноктор 5 бөлүгүн жешти. Желген бөлүгү кайсы бөлчөк?</a:t>
             </a:r>
           </a:p>
         </p:txBody>
@@ -18171,7 +18171,7 @@
                 </a:solidFill>
                 <a:latin typeface="PT Sans"/>
               </a:rPr>
-              <a:t>Жейилди = </a:t>
+              <a:t>Желди = </a:t>
             </a:r>
             <a:r>
               <a:rPr sz="3400" b="1">
